--- a/outputs/produkte/mama-ceo/03-praesentationen/saeule-4/03-lektion-4-3.pptx
+++ b/outputs/produkte/mama-ceo/03-praesentationen/saeule-4/03-lektion-4-3.pptx
@@ -4069,6 +4069,14 @@
 <file path=ppt/slides/slide1.xml><?xml version="1.0" encoding="utf-8"?>
 <p:sld xmlns:a="http://schemas.openxmlformats.org/drawingml/2006/main" xmlns:p="http://schemas.openxmlformats.org/presentationml/2006/main" xmlns:r="http://schemas.openxmlformats.org/officeDocument/2006/relationships">
   <p:cSld>
+    <p:bg>
+      <p:bgPr>
+        <a:solidFill>
+          <a:srgbClr val="F1ECDD"/>
+        </a:solidFill>
+        <a:effectLst/>
+      </p:bgPr>
+    </p:bg>
     <p:spTree>
       <p:nvGrpSpPr>
         <p:cNvPr id="1" name=""/>
@@ -4344,6 +4352,14 @@
 <file path=ppt/slides/slide2.xml><?xml version="1.0" encoding="utf-8"?>
 <p:sld xmlns:a="http://schemas.openxmlformats.org/drawingml/2006/main" xmlns:p="http://schemas.openxmlformats.org/presentationml/2006/main" xmlns:r="http://schemas.openxmlformats.org/officeDocument/2006/relationships">
   <p:cSld>
+    <p:bg>
+      <p:bgPr>
+        <a:solidFill>
+          <a:srgbClr val="F1ECDD"/>
+        </a:solidFill>
+        <a:effectLst/>
+      </p:bgPr>
+    </p:bg>
     <p:spTree>
       <p:nvGrpSpPr>
         <p:cNvPr id="1" name=""/>
@@ -4419,7 +4435,7 @@
                 </a:solidFill>
                 <a:latin typeface="Calibri"/>
               </a:rPr>
-              <a:t>▸  </a:t>
+              <a:t>✓  </a:t>
             </a:r>
             <a:r>
               <a:rPr sz="1600" b="0">
@@ -4444,7 +4460,7 @@
                 </a:solidFill>
                 <a:latin typeface="Calibri"/>
               </a:rPr>
-              <a:t>▸  </a:t>
+              <a:t>✓  </a:t>
             </a:r>
             <a:r>
               <a:rPr sz="1600" b="0">
@@ -4469,7 +4485,7 @@
                 </a:solidFill>
                 <a:latin typeface="Calibri"/>
               </a:rPr>
-              <a:t>▸  </a:t>
+              <a:t>✓  </a:t>
             </a:r>
             <a:r>
               <a:rPr sz="1600" b="0">
@@ -4563,6 +4579,14 @@
 <file path=ppt/slides/slide3.xml><?xml version="1.0" encoding="utf-8"?>
 <p:sld xmlns:a="http://schemas.openxmlformats.org/drawingml/2006/main" xmlns:p="http://schemas.openxmlformats.org/presentationml/2006/main" xmlns:r="http://schemas.openxmlformats.org/officeDocument/2006/relationships">
   <p:cSld>
+    <p:bg>
+      <p:bgPr>
+        <a:solidFill>
+          <a:srgbClr val="F1ECDD"/>
+        </a:solidFill>
+        <a:effectLst/>
+      </p:bgPr>
+    </p:bg>
     <p:spTree>
       <p:nvGrpSpPr>
         <p:cNvPr id="1" name=""/>
@@ -4638,7 +4662,7 @@
                 </a:solidFill>
                 <a:latin typeface="Calibri"/>
               </a:rPr>
-              <a:t>▸  </a:t>
+              <a:t>✓  </a:t>
             </a:r>
             <a:r>
               <a:rPr sz="1600" b="0">
@@ -4663,7 +4687,7 @@
                 </a:solidFill>
                 <a:latin typeface="Calibri"/>
               </a:rPr>
-              <a:t>▸  </a:t>
+              <a:t>✓  </a:t>
             </a:r>
             <a:r>
               <a:rPr sz="1600" b="0">
@@ -4688,7 +4712,7 @@
                 </a:solidFill>
                 <a:latin typeface="Calibri"/>
               </a:rPr>
-              <a:t>▸  </a:t>
+              <a:t>✓  </a:t>
             </a:r>
             <a:r>
               <a:rPr sz="1600" b="0">
@@ -4782,6 +4806,14 @@
 <file path=ppt/slides/slide4.xml><?xml version="1.0" encoding="utf-8"?>
 <p:sld xmlns:a="http://schemas.openxmlformats.org/drawingml/2006/main" xmlns:p="http://schemas.openxmlformats.org/presentationml/2006/main" xmlns:r="http://schemas.openxmlformats.org/officeDocument/2006/relationships">
   <p:cSld>
+    <p:bg>
+      <p:bgPr>
+        <a:solidFill>
+          <a:srgbClr val="F1ECDD"/>
+        </a:solidFill>
+        <a:effectLst/>
+      </p:bgPr>
+    </p:bg>
     <p:spTree>
       <p:nvGrpSpPr>
         <p:cNvPr id="1" name=""/>
@@ -4857,7 +4889,7 @@
                 </a:solidFill>
                 <a:latin typeface="Calibri"/>
               </a:rPr>
-              <a:t>▸  </a:t>
+              <a:t>✓  </a:t>
             </a:r>
             <a:r>
               <a:rPr sz="1600" b="0">
@@ -4882,7 +4914,7 @@
                 </a:solidFill>
                 <a:latin typeface="Calibri"/>
               </a:rPr>
-              <a:t>▸  </a:t>
+              <a:t>✓  </a:t>
             </a:r>
             <a:r>
               <a:rPr sz="1600" b="0">
@@ -4907,7 +4939,7 @@
                 </a:solidFill>
                 <a:latin typeface="Calibri"/>
               </a:rPr>
-              <a:t>▸  </a:t>
+              <a:t>✓  </a:t>
             </a:r>
             <a:r>
               <a:rPr sz="1600" b="0">
@@ -5001,6 +5033,14 @@
 <file path=ppt/slides/slide5.xml><?xml version="1.0" encoding="utf-8"?>
 <p:sld xmlns:a="http://schemas.openxmlformats.org/drawingml/2006/main" xmlns:p="http://schemas.openxmlformats.org/presentationml/2006/main" xmlns:r="http://schemas.openxmlformats.org/officeDocument/2006/relationships">
   <p:cSld>
+    <p:bg>
+      <p:bgPr>
+        <a:solidFill>
+          <a:srgbClr val="F1ECDD"/>
+        </a:solidFill>
+        <a:effectLst/>
+      </p:bgPr>
+    </p:bg>
     <p:spTree>
       <p:nvGrpSpPr>
         <p:cNvPr id="1" name=""/>
@@ -5076,7 +5116,7 @@
                 </a:solidFill>
                 <a:latin typeface="Calibri"/>
               </a:rPr>
-              <a:t>▸  </a:t>
+              <a:t>✓  </a:t>
             </a:r>
             <a:r>
               <a:rPr sz="1600" b="0">
@@ -5101,7 +5141,7 @@
                 </a:solidFill>
                 <a:latin typeface="Calibri"/>
               </a:rPr>
-              <a:t>▸  </a:t>
+              <a:t>✓  </a:t>
             </a:r>
             <a:r>
               <a:rPr sz="1600" b="0">
@@ -5126,7 +5166,7 @@
                 </a:solidFill>
                 <a:latin typeface="Calibri"/>
               </a:rPr>
-              <a:t>▸  </a:t>
+              <a:t>✓  </a:t>
             </a:r>
             <a:r>
               <a:rPr sz="1600" b="0">
@@ -5220,6 +5260,14 @@
 <file path=ppt/slides/slide6.xml><?xml version="1.0" encoding="utf-8"?>
 <p:sld xmlns:a="http://schemas.openxmlformats.org/drawingml/2006/main" xmlns:p="http://schemas.openxmlformats.org/presentationml/2006/main" xmlns:r="http://schemas.openxmlformats.org/officeDocument/2006/relationships">
   <p:cSld>
+    <p:bg>
+      <p:bgPr>
+        <a:solidFill>
+          <a:srgbClr val="F1ECDD"/>
+        </a:solidFill>
+        <a:effectLst/>
+      </p:bgPr>
+    </p:bg>
     <p:spTree>
       <p:nvGrpSpPr>
         <p:cNvPr id="1" name=""/>
@@ -5295,7 +5343,7 @@
                 </a:solidFill>
                 <a:latin typeface="Calibri"/>
               </a:rPr>
-              <a:t>▸  </a:t>
+              <a:t>✓  </a:t>
             </a:r>
             <a:r>
               <a:rPr sz="1600" b="0">
@@ -5320,7 +5368,7 @@
                 </a:solidFill>
                 <a:latin typeface="Calibri"/>
               </a:rPr>
-              <a:t>▸  </a:t>
+              <a:t>✓  </a:t>
             </a:r>
             <a:r>
               <a:rPr sz="1600" b="0">
@@ -5345,7 +5393,7 @@
                 </a:solidFill>
                 <a:latin typeface="Calibri"/>
               </a:rPr>
-              <a:t>▸  </a:t>
+              <a:t>✓  </a:t>
             </a:r>
             <a:r>
               <a:rPr sz="1600" b="0">
@@ -5439,6 +5487,14 @@
 <file path=ppt/slides/slide7.xml><?xml version="1.0" encoding="utf-8"?>
 <p:sld xmlns:a="http://schemas.openxmlformats.org/drawingml/2006/main" xmlns:p="http://schemas.openxmlformats.org/presentationml/2006/main" xmlns:r="http://schemas.openxmlformats.org/officeDocument/2006/relationships">
   <p:cSld>
+    <p:bg>
+      <p:bgPr>
+        <a:solidFill>
+          <a:srgbClr val="F1ECDD"/>
+        </a:solidFill>
+        <a:effectLst/>
+      </p:bgPr>
+    </p:bg>
     <p:spTree>
       <p:nvGrpSpPr>
         <p:cNvPr id="1" name=""/>
@@ -5514,7 +5570,7 @@
                 </a:solidFill>
                 <a:latin typeface="Calibri"/>
               </a:rPr>
-              <a:t>▸  </a:t>
+              <a:t>✓  </a:t>
             </a:r>
             <a:r>
               <a:rPr sz="1600" b="0">
@@ -5539,7 +5595,7 @@
                 </a:solidFill>
                 <a:latin typeface="Calibri"/>
               </a:rPr>
-              <a:t>▸  </a:t>
+              <a:t>✓  </a:t>
             </a:r>
             <a:r>
               <a:rPr sz="1600" b="0">
@@ -5564,7 +5620,7 @@
                 </a:solidFill>
                 <a:latin typeface="Calibri"/>
               </a:rPr>
-              <a:t>▸  </a:t>
+              <a:t>✓  </a:t>
             </a:r>
             <a:r>
               <a:rPr sz="1600" b="0">
@@ -5658,6 +5714,14 @@
 <file path=ppt/slides/slide8.xml><?xml version="1.0" encoding="utf-8"?>
 <p:sld xmlns:a="http://schemas.openxmlformats.org/drawingml/2006/main" xmlns:p="http://schemas.openxmlformats.org/presentationml/2006/main" xmlns:r="http://schemas.openxmlformats.org/officeDocument/2006/relationships">
   <p:cSld>
+    <p:bg>
+      <p:bgPr>
+        <a:solidFill>
+          <a:srgbClr val="F1ECDD"/>
+        </a:solidFill>
+        <a:effectLst/>
+      </p:bgPr>
+    </p:bg>
     <p:spTree>
       <p:nvGrpSpPr>
         <p:cNvPr id="1" name=""/>
@@ -5733,7 +5797,7 @@
                 </a:solidFill>
                 <a:latin typeface="Calibri"/>
               </a:rPr>
-              <a:t>▸  </a:t>
+              <a:t>✓  </a:t>
             </a:r>
             <a:r>
               <a:rPr sz="1600" b="0">
@@ -5758,7 +5822,7 @@
                 </a:solidFill>
                 <a:latin typeface="Calibri"/>
               </a:rPr>
-              <a:t>▸  </a:t>
+              <a:t>✓  </a:t>
             </a:r>
             <a:r>
               <a:rPr sz="1600" b="0">
@@ -5783,7 +5847,7 @@
                 </a:solidFill>
                 <a:latin typeface="Calibri"/>
               </a:rPr>
-              <a:t>▸  </a:t>
+              <a:t>✓  </a:t>
             </a:r>
             <a:r>
               <a:rPr sz="1600" b="0">
@@ -5877,6 +5941,14 @@
 <file path=ppt/slides/slide9.xml><?xml version="1.0" encoding="utf-8"?>
 <p:sld xmlns:a="http://schemas.openxmlformats.org/drawingml/2006/main" xmlns:p="http://schemas.openxmlformats.org/presentationml/2006/main" xmlns:r="http://schemas.openxmlformats.org/officeDocument/2006/relationships">
   <p:cSld>
+    <p:bg>
+      <p:bgPr>
+        <a:solidFill>
+          <a:srgbClr val="F1ECDD"/>
+        </a:solidFill>
+        <a:effectLst/>
+      </p:bgPr>
+    </p:bg>
     <p:spTree>
       <p:nvGrpSpPr>
         <p:cNvPr id="1" name=""/>
@@ -5952,7 +6024,7 @@
                 </a:solidFill>
                 <a:latin typeface="Calibri"/>
               </a:rPr>
-              <a:t>▸  </a:t>
+              <a:t>✓  </a:t>
             </a:r>
             <a:r>
               <a:rPr sz="1600" b="0">
@@ -5977,7 +6049,7 @@
                 </a:solidFill>
                 <a:latin typeface="Calibri"/>
               </a:rPr>
-              <a:t>▸  </a:t>
+              <a:t>✓  </a:t>
             </a:r>
             <a:r>
               <a:rPr sz="1600" b="0">

--- a/outputs/produkte/mama-ceo/03-praesentationen/saeule-4/03-lektion-4-3.pptx
+++ b/outputs/produkte/mama-ceo/03-praesentationen/saeule-4/03-lektion-4-3.pptx
@@ -14,6 +14,7 @@
     <p:sldId id="262" r:id="rId14"/>
     <p:sldId id="263" r:id="rId15"/>
     <p:sldId id="264" r:id="rId16"/>
+    <p:sldId id="265" r:id="rId17"/>
   </p:sldIdLst>
   <p:sldSz cx="9144000" cy="5143500" type="screen4x3"/>
   <p:notesSz cx="6858000" cy="9144000"/>
@@ -535,6 +536,76 @@
 </p:notes>
 </file>
 
+<file path=ppt/notesSlides/notesSlide10.xml><?xml version="1.0" encoding="utf-8"?>
+<p:notes xmlns:a="http://schemas.openxmlformats.org/drawingml/2006/main" xmlns:p="http://schemas.openxmlformats.org/presentationml/2006/main" xmlns:r="http://schemas.openxmlformats.org/officeDocument/2006/relationships">
+  <p:cSld>
+    <p:spTree>
+      <p:nvGrpSpPr>
+        <p:cNvPr id="1" name=""/>
+        <p:cNvGrpSpPr/>
+        <p:nvPr/>
+      </p:nvGrpSpPr>
+      <p:grpSpPr>
+        <a:xfrm>
+          <a:off x="0" y="0"/>
+          <a:ext cx="0" cy="0"/>
+          <a:chOff x="0" y="0"/>
+          <a:chExt cx="0" cy="0"/>
+        </a:xfrm>
+      </p:grpSpPr>
+      <p:sp>
+        <p:nvSpPr>
+          <p:cNvPr id="2" name="Slide Image Placeholder 1"/>
+          <p:cNvSpPr>
+            <a:spLocks noGrp="1"/>
+          </p:cNvSpPr>
+          <p:nvPr>
+            <p:ph type="sldImg" idx="2"/>
+          </p:nvPr>
+        </p:nvSpPr>
+        <p:spPr/>
+      </p:sp>
+      <p:sp>
+        <p:nvSpPr>
+          <p:cNvPr id="3" name="Notes Placeholder 2"/>
+          <p:cNvSpPr>
+            <a:spLocks noGrp="1"/>
+          </p:cNvSpPr>
+          <p:nvPr>
+            <p:ph type="body" idx="3" sz="quarter"/>
+          </p:nvPr>
+        </p:nvSpPr>
+        <p:spPr/>
+        <p:txBody>
+          <a:bodyPr/>
+          <a:lstStyle/>
+          <a:p>
+            <a:r>
+              <a:t>Im Arbeitsblatt schreibst du jetzt deinen Business-Brief, Baustein für Baustein, und du legst ihn als Notiz ab, wo du ihn immer findest. Den brauchst du in der nächsten Lektion sofort, denn da bauen wir deinen ersten echten Bot, den Cockpit-Bot. Bis gleich.</a:t>
+            </a:r>
+          </a:p>
+        </p:txBody>
+      </p:sp>
+      <p:sp>
+        <p:nvSpPr>
+          <p:cNvPr id="4" name="Slide Number Placeholder 3"/>
+          <p:cNvSpPr>
+            <a:spLocks noGrp="1"/>
+          </p:cNvSpPr>
+          <p:nvPr>
+            <p:ph type="sldNum" idx="5" sz="quarter"/>
+          </p:nvPr>
+        </p:nvSpPr>
+        <p:spPr/>
+      </p:sp>
+    </p:spTree>
+  </p:cSld>
+  <p:clrMapOvr>
+    <a:masterClrMapping/>
+  </p:clrMapOvr>
+</p:notes>
+</file>
+
 <file path=ppt/notesSlides/notesSlide2.xml><?xml version="1.0" encoding="utf-8"?>
 <p:notes xmlns:a="http://schemas.openxmlformats.org/drawingml/2006/main" xmlns:p="http://schemas.openxmlformats.org/presentationml/2006/main" xmlns:r="http://schemas.openxmlformats.org/officeDocument/2006/relationships">
   <p:cSld>
@@ -1000,7 +1071,7 @@
           <a:lstStyle/>
           <a:p>
             <a:r>
-              <a:t>Ich zeig dir jetzt meinen eigenen Business-Brief, damit du ein Gefühl kriegst. Du siehst, das ist nichts Hochgestochenes, sondern in normalen Worten: wer ich bin, für wen ich da bin, wie ich rede und was bei mir nie vorkommt. Genau so grob und ehrlich darf deiner auch sein.</a:t>
+              <a:t>Und jetzt mein Lieblings-Trick, den ich selbst die ganze Zeit benutze: du musst dieses Blatt gar nicht alleine ausfüllen. Sag der KI einfach, sie soll tun, als würde sie ein Buch über dich und dein Business schreiben, und sie soll dir so lange und so vertieft Fragen stellen, bis sie wirklich alle Infos von dir hat. Dann sitzt du nicht vor einem leeren Blatt, sondern beantwortest einfach eine Frage nach der anderen, und am Schluss spuckt sie dir deinen fertigen Business-Brief aus. Genau diesen Prompt hab ich dir als Bonus dazugelegt, du musst ihn nur reinkopieren.</a:t>
             </a:r>
           </a:p>
         </p:txBody>
@@ -1070,7 +1141,7 @@
           <a:lstStyle/>
           <a:p>
             <a:r>
-              <a:t>Im Arbeitsblatt schreibst du jetzt deinen Business-Brief, Baustein für Baustein, und du legst ihn als Notiz ab, wo du ihn immer findest. Den brauchst du in der nächsten Lektion sofort, denn da bauen wir deinen ersten echten Bot, den Cockpit-Bot. Bis gleich.</a:t>
+              <a:t>Ich zeig dir jetzt meinen eigenen Business-Brief, damit du ein Gefühl kriegst. Du siehst, das ist nichts Hochgestochenes, sondern in normalen Worten: wer ich bin, für wen ich da bin, wie ich rede und was bei mir nie vorkommt. Genau so grob und ehrlich darf deiner auch sein.</a:t>
             </a:r>
           </a:p>
         </p:txBody>
@@ -4349,6 +4420,208 @@
 </p:sld>
 </file>
 
+<file path=ppt/slides/slide10.xml><?xml version="1.0" encoding="utf-8"?>
+<p:sld xmlns:a="http://schemas.openxmlformats.org/drawingml/2006/main" xmlns:p="http://schemas.openxmlformats.org/presentationml/2006/main" xmlns:r="http://schemas.openxmlformats.org/officeDocument/2006/relationships">
+  <p:cSld>
+    <p:bg>
+      <p:bgPr>
+        <a:solidFill>
+          <a:srgbClr val="F1ECDD"/>
+        </a:solidFill>
+        <a:effectLst/>
+      </p:bgPr>
+    </p:bg>
+    <p:spTree>
+      <p:nvGrpSpPr>
+        <p:cNvPr id="1" name=""/>
+        <p:cNvGrpSpPr/>
+        <p:nvPr/>
+      </p:nvGrpSpPr>
+      <p:grpSpPr/>
+      <p:sp>
+        <p:nvSpPr>
+          <p:cNvPr id="2" name="TextBox 1"/>
+          <p:cNvSpPr txBox="1"/>
+          <p:nvPr/>
+        </p:nvSpPr>
+        <p:spPr>
+          <a:xfrm>
+            <a:off x="548640" y="457200"/>
+            <a:ext cx="8046720" cy="914400"/>
+          </a:xfrm>
+          <a:prstGeom prst="rect">
+            <a:avLst/>
+          </a:prstGeom>
+          <a:noFill/>
+        </p:spPr>
+        <p:txBody>
+          <a:bodyPr wrap="square">
+            <a:spAutoFit/>
+          </a:bodyPr>
+          <a:lstStyle/>
+          <a:p>
+            <a:r>
+              <a:rPr sz="3000" b="1">
+                <a:solidFill>
+                  <a:srgbClr val="1A3A4A"/>
+                </a:solidFill>
+                <a:latin typeface="Georgia"/>
+              </a:rPr>
+              <a:t>Arbeitsblatt + nächste Lektion</a:t>
+            </a:r>
+          </a:p>
+        </p:txBody>
+      </p:sp>
+      <p:sp>
+        <p:nvSpPr>
+          <p:cNvPr id="3" name="TextBox 2"/>
+          <p:cNvSpPr txBox="1"/>
+          <p:nvPr/>
+        </p:nvSpPr>
+        <p:spPr>
+          <a:xfrm>
+            <a:off x="548640" y="1417320"/>
+            <a:ext cx="8046720" cy="3154680"/>
+          </a:xfrm>
+          <a:prstGeom prst="rect">
+            <a:avLst/>
+          </a:prstGeom>
+          <a:noFill/>
+        </p:spPr>
+        <p:txBody>
+          <a:bodyPr wrap="square">
+            <a:spAutoFit/>
+          </a:bodyPr>
+          <a:lstStyle/>
+          <a:p>
+            <a:pPr>
+              <a:spcAft>
+                <a:spcPts val="1000"/>
+              </a:spcAft>
+            </a:pPr>
+            <a:r>
+              <a:rPr sz="1600" b="1">
+                <a:solidFill>
+                  <a:srgbClr val="12828C"/>
+                </a:solidFill>
+                <a:latin typeface="Calibri"/>
+              </a:rPr>
+              <a:t>✓  </a:t>
+            </a:r>
+            <a:r>
+              <a:rPr sz="1600" b="0">
+                <a:solidFill>
+                  <a:srgbClr val="2C3E50"/>
+                </a:solidFill>
+                <a:latin typeface="Calibri"/>
+              </a:rPr>
+              <a:t>📋 Schreib deinen Business-Brief (6 Bausteine)</a:t>
+            </a:r>
+          </a:p>
+          <a:p>
+            <a:pPr>
+              <a:spcAft>
+                <a:spcPts val="1000"/>
+              </a:spcAft>
+            </a:pPr>
+            <a:r>
+              <a:rPr sz="1600" b="1">
+                <a:solidFill>
+                  <a:srgbClr val="12828C"/>
+                </a:solidFill>
+                <a:latin typeface="Calibri"/>
+              </a:rPr>
+              <a:t>✓  </a:t>
+            </a:r>
+            <a:r>
+              <a:rPr sz="1600" b="0">
+                <a:solidFill>
+                  <a:srgbClr val="2C3E50"/>
+                </a:solidFill>
+                <a:latin typeface="Calibri"/>
+              </a:rPr>
+              <a:t>Nächste Lektion: 4.4 — Cockpit-Bot bauen</a:t>
+            </a:r>
+          </a:p>
+        </p:txBody>
+      </p:sp>
+      <p:sp>
+        <p:nvSpPr>
+          <p:cNvPr id="4" name="TextBox 3"/>
+          <p:cNvSpPr txBox="1"/>
+          <p:nvPr/>
+        </p:nvSpPr>
+        <p:spPr>
+          <a:xfrm>
+            <a:off x="457200" y="4754880"/>
+            <a:ext cx="5486400" cy="274320"/>
+          </a:xfrm>
+          <a:prstGeom prst="rect">
+            <a:avLst/>
+          </a:prstGeom>
+          <a:noFill/>
+        </p:spPr>
+        <p:txBody>
+          <a:bodyPr wrap="square">
+            <a:spAutoFit/>
+          </a:bodyPr>
+          <a:lstStyle/>
+          <a:p>
+            <a:r>
+              <a:rPr sz="900" b="0">
+                <a:solidFill>
+                  <a:srgbClr val="7A8A95"/>
+                </a:solidFill>
+                <a:latin typeface="Calibri"/>
+              </a:rPr>
+              <a:t>Mama-CEO · Säule 4 · Lektion 4.3</a:t>
+            </a:r>
+          </a:p>
+        </p:txBody>
+      </p:sp>
+      <p:sp>
+        <p:nvSpPr>
+          <p:cNvPr id="5" name="TextBox 4"/>
+          <p:cNvSpPr txBox="1"/>
+          <p:nvPr/>
+        </p:nvSpPr>
+        <p:spPr>
+          <a:xfrm>
+            <a:off x="6400800" y="4754880"/>
+            <a:ext cx="2286000" cy="274320"/>
+          </a:xfrm>
+          <a:prstGeom prst="rect">
+            <a:avLst/>
+          </a:prstGeom>
+          <a:noFill/>
+        </p:spPr>
+        <p:txBody>
+          <a:bodyPr wrap="square">
+            <a:spAutoFit/>
+          </a:bodyPr>
+          <a:lstStyle/>
+          <a:p>
+            <a:pPr algn="r"/>
+            <a:r>
+              <a:rPr sz="900" b="0">
+                <a:solidFill>
+                  <a:srgbClr val="7A8A95"/>
+                </a:solidFill>
+                <a:latin typeface="Calibri"/>
+              </a:rPr>
+              <a:t>Mum Life Balance</a:t>
+            </a:r>
+          </a:p>
+        </p:txBody>
+      </p:sp>
+    </p:spTree>
+  </p:cSld>
+  <p:clrMapOvr>
+    <a:masterClrMapping/>
+  </p:clrMapOvr>
+</p:sld>
+</file>
+
 <file path=ppt/slides/slide2.xml><?xml version="1.0" encoding="utf-8"?>
 <p:sld xmlns:a="http://schemas.openxmlformats.org/drawingml/2006/main" xmlns:p="http://schemas.openxmlformats.org/presentationml/2006/main" xmlns:r="http://schemas.openxmlformats.org/officeDocument/2006/relationships">
   <p:cSld>
@@ -5758,7 +6031,7 @@
                 </a:solidFill>
                 <a:latin typeface="Georgia"/>
               </a:rPr>
-              <a:t>Mein Business-Brief als Beispiel</a:t>
+              <a:t>Der einfachere Weg: lass dich interviewen</a:t>
             </a:r>
           </a:p>
         </p:txBody>
@@ -5806,7 +6079,7 @@
                 </a:solidFill>
                 <a:latin typeface="Calibri"/>
               </a:rPr>
-              <a:t>Nichts Hochgestochenes</a:t>
+              <a:t>Sag: „schreib ein Buch über mich"</a:t>
             </a:r>
           </a:p>
           <a:p>
@@ -5831,7 +6104,7 @@
                 </a:solidFill>
                 <a:latin typeface="Calibri"/>
               </a:rPr>
-              <a:t>Normale Worte: wer, für wen, wie, was nie</a:t>
+              <a:t>Die KI fragt so lange, bis sie alles hat</a:t>
             </a:r>
           </a:p>
           <a:p>
@@ -5856,7 +6129,7 @@
                 </a:solidFill>
                 <a:latin typeface="Calibri"/>
               </a:rPr>
-              <a:t>Grob und ehrlich reicht</a:t>
+              <a:t>Fertiger Brief am Schluss — Prompt liegt als Bonus bei</a:t>
             </a:r>
           </a:p>
         </p:txBody>
@@ -5985,7 +6258,7 @@
                 </a:solidFill>
                 <a:latin typeface="Georgia"/>
               </a:rPr>
-              <a:t>Arbeitsblatt + nächste Lektion</a:t>
+              <a:t>Mein Business-Brief als Beispiel</a:t>
             </a:r>
           </a:p>
         </p:txBody>
@@ -6033,7 +6306,7 @@
                 </a:solidFill>
                 <a:latin typeface="Calibri"/>
               </a:rPr>
-              <a:t>📋 Schreib deinen Business-Brief (6 Bausteine)</a:t>
+              <a:t>Nichts Hochgestochenes</a:t>
             </a:r>
           </a:p>
           <a:p>
@@ -6058,7 +6331,32 @@
                 </a:solidFill>
                 <a:latin typeface="Calibri"/>
               </a:rPr>
-              <a:t>Nächste Lektion: 4.4 — Cockpit-Bot bauen</a:t>
+              <a:t>Normale Worte: wer, für wen, wie, was nie</a:t>
+            </a:r>
+          </a:p>
+          <a:p>
+            <a:pPr>
+              <a:spcAft>
+                <a:spcPts val="1000"/>
+              </a:spcAft>
+            </a:pPr>
+            <a:r>
+              <a:rPr sz="1600" b="1">
+                <a:solidFill>
+                  <a:srgbClr val="12828C"/>
+                </a:solidFill>
+                <a:latin typeface="Calibri"/>
+              </a:rPr>
+              <a:t>✓  </a:t>
+            </a:r>
+            <a:r>
+              <a:rPr sz="1600" b="0">
+                <a:solidFill>
+                  <a:srgbClr val="2C3E50"/>
+                </a:solidFill>
+                <a:latin typeface="Calibri"/>
+              </a:rPr>
+              <a:t>Grob und ehrlich reicht</a:t>
             </a:r>
           </a:p>
         </p:txBody>
